--- a/Q3-2026-Review-Q4-Outlook.pptx
+++ b/Q3-2026-Review-Q4-Outlook.pptx
@@ -591,7 +591,7 @@
           <a:p>
             <a:r>
               <a:rPr lang="en-US" dirty="0"/>
-              <a:t>Q4 moves from adoption to scale — the same foundations are reused: self-service triggering for controllers, two new calculator families onboarded, and a de-risked Airflow upgrade path.</a:t>
+              <a:t>Q4 moves from adoption to scale — the same foundations are reused. SAP PAPM is discovery-led because connecting Airflow to an SAP system adds complexity; modernisation finalises the target architecture and analyses the Airflow 3.x upgrade: self-service triggering for controllers, two new calculator families onboarded, and a de-risked Airflow upgrade path.</a:t>
             </a:r>
             <a:endParaRPr lang="en-US" dirty="0"/>
           </a:p>
@@ -2503,7 +2503,7 @@
                 <a:ea typeface="Calibri" pitchFamily="34" charset="-122"/>
                 <a:cs typeface="Calibri" pitchFamily="34" charset="-120"/>
               </a:rPr>
-              <a:t>Fully automated NSFR runs</a:t>
+              <a:t>NSFR automated &amp; observable</a:t>
             </a:r>
             <a:endParaRPr lang="en-US" sz="1250" dirty="0"/>
           </a:p>
@@ -2542,7 +2542,7 @@
                 <a:ea typeface="Calibri" pitchFamily="34" charset="-122"/>
                 <a:cs typeface="Calibri" pitchFamily="34" charset="-120"/>
               </a:rPr>
-              <a:t>All NSFR modular calculators integrated and automated end-to-end through the Orchestration Platform.</a:t>
+              <a:t>All NSFR modular calculators automated via the Orchestration Platform, with their KPIs live in AmpliFi.</a:t>
             </a:r>
             <a:endParaRPr lang="en-US" sz="1000" dirty="0"/>
           </a:p>
@@ -2581,7 +2581,7 @@
                 <a:ea typeface="Calibri" pitchFamily="34" charset="-122"/>
                 <a:cs typeface="Calibri" pitchFamily="34" charset="-120"/>
               </a:rPr>
-              <a:t>Automated, repeatable NSFR runs</a:t>
+              <a:t>End-to-end automated and visible</a:t>
             </a:r>
             <a:endParaRPr lang="en-US" sz="1050" dirty="0"/>
           </a:p>
@@ -2635,7 +2635,7 @@
               <a:buNone/>
             </a:pPr>
             <a:r>
-              <a:rPr lang="en-US" sz="800" b="1" spc="100" kern="0" dirty="0">
+              <a:rPr lang="en-US" sz="900" dirty="0">
                 <a:solidFill>
                   <a:srgbClr val="6B7280"/>
                 </a:solidFill>
@@ -2643,13 +2643,13 @@
                 <a:ea typeface="Calibri" pitchFamily="34" charset="-122"/>
                 <a:cs typeface="Calibri" pitchFamily="34" charset="-120"/>
               </a:rPr>
-              <a:t>POWERED BY  </a:t>
-            </a:r>
-            <a:pPr indent="0" marL="0">
-              <a:buNone/>
-            </a:pPr>
-            <a:r>
-              <a:rPr lang="en-US" sz="950" b="1" dirty="0">
+              <a:t>Built on  </a:t>
+            </a:r>
+            <a:pPr indent="0" marL="0">
+              <a:buNone/>
+            </a:pPr>
+            <a:r>
+              <a:rPr lang="en-US" sz="900" b="1" dirty="0">
                 <a:solidFill>
                   <a:srgbClr val="1B2230"/>
                 </a:solidFill>
@@ -2657,9 +2657,9 @@
                 <a:ea typeface="Calibri" pitchFamily="34" charset="-122"/>
                 <a:cs typeface="Calibri" pitchFamily="34" charset="-120"/>
               </a:rPr>
-              <a:t>Orchestration Platform</a:t>
-            </a:r>
-            <a:endParaRPr lang="en-US" sz="800" dirty="0"/>
+              <a:t>Orchestration + Observability</a:t>
+            </a:r>
+            <a:endParaRPr lang="en-US" sz="900" dirty="0"/>
           </a:p>
         </p:txBody>
       </p:sp>
@@ -2806,7 +2806,7 @@
                 <a:ea typeface="Calibri" pitchFamily="34" charset="-122"/>
                 <a:cs typeface="Calibri" pitchFamily="34" charset="-120"/>
               </a:rPr>
-              <a:t>NSFR</a:t>
+              <a:t>CAPITAL</a:t>
             </a:r>
             <a:endParaRPr lang="en-US" sz="850" dirty="0"/>
           </a:p>
@@ -2845,7 +2845,7 @@
                 <a:ea typeface="Calibri" pitchFamily="34" charset="-122"/>
                 <a:cs typeface="Calibri" pitchFamily="34" charset="-120"/>
               </a:rPr>
-              <a:t>NSFR KPIs live in AmpliFi</a:t>
+              <a:t>Live SLA breach detection</a:t>
             </a:r>
             <a:endParaRPr lang="en-US" sz="1250" dirty="0"/>
           </a:p>
@@ -2884,7 +2884,7 @@
                 <a:ea typeface="Calibri" pitchFamily="34" charset="-122"/>
                 <a:cs typeface="Calibri" pitchFamily="34" charset="-120"/>
               </a:rPr>
-              <a:t>Key performance metrics for NSFR modular calculators flow into AmpliFi through the Observability Service.</a:t>
+              <a:t>Running Capital calculators tracked in real time; SLA breaches detected live and alerted via Azure App Insights.</a:t>
             </a:r>
             <a:endParaRPr lang="en-US" sz="1000" dirty="0"/>
           </a:p>
@@ -2923,7 +2923,7 @@
                 <a:ea typeface="Calibri" pitchFamily="34" charset="-122"/>
                 <a:cs typeface="Calibri" pitchFamily="34" charset="-120"/>
               </a:rPr>
-              <a:t>Self-service performance insight</a:t>
+              <a:t>Timely action on critical processes</a:t>
             </a:r>
             <a:endParaRPr lang="en-US" sz="1050" dirty="0"/>
           </a:p>
@@ -2977,7 +2977,7 @@
               <a:buNone/>
             </a:pPr>
             <a:r>
-              <a:rPr lang="en-US" sz="800" b="1" spc="100" kern="0" dirty="0">
+              <a:rPr lang="en-US" sz="900" dirty="0">
                 <a:solidFill>
                   <a:srgbClr val="6B7280"/>
                 </a:solidFill>
@@ -2985,13 +2985,13 @@
                 <a:ea typeface="Calibri" pitchFamily="34" charset="-122"/>
                 <a:cs typeface="Calibri" pitchFamily="34" charset="-120"/>
               </a:rPr>
-              <a:t>POWERED BY  </a:t>
-            </a:r>
-            <a:pPr indent="0" marL="0">
-              <a:buNone/>
-            </a:pPr>
-            <a:r>
-              <a:rPr lang="en-US" sz="950" b="1" dirty="0">
+              <a:t>Built on  </a:t>
+            </a:r>
+            <a:pPr indent="0" marL="0">
+              <a:buNone/>
+            </a:pPr>
+            <a:r>
+              <a:rPr lang="en-US" sz="900" b="1" dirty="0">
                 <a:solidFill>
                   <a:srgbClr val="1B2230"/>
                 </a:solidFill>
@@ -3001,7 +3001,7 @@
               </a:rPr>
               <a:t>Observability Service</a:t>
             </a:r>
-            <a:endParaRPr lang="en-US" sz="800" dirty="0"/>
+            <a:endParaRPr lang="en-US" sz="900" dirty="0"/>
           </a:p>
         </p:txBody>
       </p:sp>
@@ -3148,7 +3148,7 @@
                 <a:ea typeface="Calibri" pitchFamily="34" charset="-122"/>
                 <a:cs typeface="Calibri" pitchFamily="34" charset="-120"/>
               </a:rPr>
-              <a:t>CAPITAL</a:t>
+              <a:t>PLATFORM</a:t>
             </a:r>
             <a:endParaRPr lang="en-US" sz="850" dirty="0"/>
           </a:p>
@@ -3187,7 +3187,7 @@
                 <a:ea typeface="Calibri" pitchFamily="34" charset="-122"/>
                 <a:cs typeface="Calibri" pitchFamily="34" charset="-120"/>
               </a:rPr>
-              <a:t>Live SLA breach detection</a:t>
+              <a:t>Scale &amp; performance</a:t>
             </a:r>
             <a:endParaRPr lang="en-US" sz="1250" dirty="0"/>
           </a:p>
@@ -3226,7 +3226,7 @@
                 <a:ea typeface="Calibri" pitchFamily="34" charset="-122"/>
                 <a:cs typeface="Calibri" pitchFamily="34" charset="-120"/>
               </a:rPr>
-              <a:t>Running Capital calculators tracked in real time; SLA breaches detected live and alerted via Azure App Insights.</a:t>
+              <a:t>3 new tenants on Orchestration (NSFR, IPV, PnL); Redis cache brings AmpliFi UI response under 400 ms.</a:t>
             </a:r>
             <a:endParaRPr lang="en-US" sz="1000" dirty="0"/>
           </a:p>
@@ -3265,7 +3265,7 @@
                 <a:ea typeface="Calibri" pitchFamily="34" charset="-122"/>
                 <a:cs typeface="Calibri" pitchFamily="34" charset="-120"/>
               </a:rPr>
-              <a:t>Timely action on critical processes</a:t>
+              <a:t>More teams onboard, faster insight</a:t>
             </a:r>
             <a:endParaRPr lang="en-US" sz="1050" dirty="0"/>
           </a:p>
@@ -3319,7 +3319,7 @@
               <a:buNone/>
             </a:pPr>
             <a:r>
-              <a:rPr lang="en-US" sz="800" b="1" spc="100" kern="0" dirty="0">
+              <a:rPr lang="en-US" sz="900" dirty="0">
                 <a:solidFill>
                   <a:srgbClr val="6B7280"/>
                 </a:solidFill>
@@ -3327,13 +3327,13 @@
                 <a:ea typeface="Calibri" pitchFamily="34" charset="-122"/>
                 <a:cs typeface="Calibri" pitchFamily="34" charset="-120"/>
               </a:rPr>
-              <a:t>POWERED BY  </a:t>
-            </a:r>
-            <a:pPr indent="0" marL="0">
-              <a:buNone/>
-            </a:pPr>
-            <a:r>
-              <a:rPr lang="en-US" sz="950" b="1" dirty="0">
+              <a:t>Built on  </a:t>
+            </a:r>
+            <a:pPr indent="0" marL="0">
+              <a:buNone/>
+            </a:pPr>
+            <a:r>
+              <a:rPr lang="en-US" sz="900" b="1" dirty="0">
                 <a:solidFill>
                   <a:srgbClr val="1B2230"/>
                 </a:solidFill>
@@ -3341,9 +3341,9 @@
                 <a:ea typeface="Calibri" pitchFamily="34" charset="-122"/>
                 <a:cs typeface="Calibri" pitchFamily="34" charset="-120"/>
               </a:rPr>
-              <a:t>Observability Service</a:t>
-            </a:r>
-            <a:endParaRPr lang="en-US" sz="800" dirty="0"/>
+              <a:t>Orchestration + Observability</a:t>
+            </a:r>
+            <a:endParaRPr lang="en-US" sz="900" dirty="0"/>
           </a:p>
         </p:txBody>
       </p:sp>
@@ -3380,7 +3380,7 @@
                 <a:ea typeface="Calibri" pitchFamily="34" charset="-122"/>
                 <a:cs typeface="Calibri" pitchFamily="34" charset="-120"/>
               </a:rPr>
-              <a:t>PLATFORM RESILIENCE &amp; PERFORMANCE</a:t>
+              <a:t>PLATFORM RESILIENCE &amp; SIMPLIFICATION</a:t>
             </a:r>
             <a:endParaRPr lang="en-US" sz="1000" dirty="0"/>
           </a:p>
@@ -3627,7 +3627,7 @@
                 <a:ea typeface="Calibri" pitchFamily="34" charset="-122"/>
                 <a:cs typeface="Calibri" pitchFamily="34" charset="-120"/>
               </a:rPr>
-              <a:t>UI performance</a:t>
+              <a:t>Legacy simplification</a:t>
             </a:r>
             <a:endParaRPr lang="en-US" sz="1100" dirty="0"/>
           </a:p>
@@ -3644,7 +3644,7 @@
                 <a:ea typeface="Calibri" pitchFamily="34" charset="-122"/>
                 <a:cs typeface="Calibri" pitchFamily="34" charset="-120"/>
               </a:rPr>
-              <a:t>Redis cache integration improved query latency — &lt;400 ms response to the UI.</a:t>
+              <a:t>IPV and task-state apps decommissioned, reducing the estate to support.</a:t>
             </a:r>
             <a:endParaRPr lang="en-US" sz="1100" dirty="0"/>
           </a:p>
@@ -3759,7 +3759,7 @@
                 <a:ea typeface="Calibri" pitchFamily="34" charset="-122"/>
                 <a:cs typeface="Calibri" pitchFamily="34" charset="-120"/>
               </a:rPr>
-              <a:t>Simplification &amp; risk</a:t>
+              <a:t>Release &amp; security</a:t>
             </a:r>
             <a:endParaRPr lang="en-US" sz="1100" dirty="0"/>
           </a:p>
@@ -3776,7 +3776,7 @@
                 <a:ea typeface="Calibri" pitchFamily="34" charset="-122"/>
                 <a:cs typeface="Calibri" pitchFamily="34" charset="-120"/>
               </a:rPr>
-              <a:t>IPV &amp; task-state apps decommissioned; Release Process Framework; VM15 remediation ongoing.</a:t>
+              <a:t>Multi-tenant Release Process Framework established; VM15 remediation ongoing.</a:t>
             </a:r>
             <a:endParaRPr lang="en-US" sz="1100" dirty="0"/>
           </a:p>
@@ -4282,7 +4282,7 @@
                 <a:ea typeface="Calibri" pitchFamily="34" charset="-122"/>
                 <a:cs typeface="Calibri" pitchFamily="34" charset="-120"/>
               </a:rPr>
-              <a:t>A repeatable onboarding pattern at scale — Equity and SAP PAPM calculators run on ACD Airflow with observability from day one, users trigger calculators on demand, and a de-risked path to next-generation orchestration.</a:t>
+              <a:t>A repeatable onboarding pattern at scale — Equity calculators on ACD Airflow with observability from day one, a validated SAP PAPM integration path, on-demand calculator triggers for users, and a finalised modernisation architecture with an Airflow 3.x upgrade plan.</a:t>
             </a:r>
             <a:endParaRPr lang="en-US" sz="1050" dirty="0"/>
           </a:p>
@@ -5315,7 +5315,7 @@
                 <a:ea typeface="Calibri" pitchFamily="34" charset="-122"/>
                 <a:cs typeface="Calibri" pitchFamily="34" charset="-120"/>
               </a:rPr>
-              <a:t>SAP PAPM Integration</a:t>
+              <a:t>SAP PAPM — Discover &amp; Integrate</a:t>
             </a:r>
             <a:endParaRPr lang="en-US" sz="1300" dirty="0"/>
           </a:p>
@@ -5434,7 +5434,7 @@
                 <a:ea typeface="Calibri" pitchFamily="34" charset="-122"/>
                 <a:cs typeface="Calibri" pitchFamily="34" charset="-120"/>
               </a:rPr>
-              <a:t>Extend the orchestration foundation to SAP PAPM, integrating and onboarding its calculators onto ACD Airflow.</a:t>
+              <a:t>Discover first (SAP adds connectivity complexity), then integrate PAPM calculators with ACD Airflow.</a:t>
             </a:r>
             <a:endParaRPr lang="en-US" sz="1050" dirty="0"/>
           </a:p>
@@ -5516,7 +5516,7 @@
                 <a:ea typeface="Calibri" pitchFamily="34" charset="-122"/>
                 <a:cs typeface="Calibri" pitchFamily="34" charset="-120"/>
               </a:rPr>
-              <a:t>Common orchestration &amp; governance</a:t>
+              <a:t>Integration risks surfaced early</a:t>
             </a:r>
             <a:endParaRPr lang="en-US" sz="1000" dirty="0"/>
           </a:p>
@@ -5537,7 +5537,7 @@
                 <a:ea typeface="Calibri" pitchFamily="34" charset="-122"/>
                 <a:cs typeface="Calibri" pitchFamily="34" charset="-120"/>
               </a:rPr>
-              <a:t>Fewer fragmented run processes</a:t>
+              <a:t>Path to common orchestration for SAP</a:t>
             </a:r>
             <a:endParaRPr lang="en-US" sz="1000" dirty="0"/>
           </a:p>
@@ -5590,7 +5590,7 @@
                 <a:ea typeface="Calibri" pitchFamily="34" charset="-122"/>
                 <a:cs typeface="Calibri" pitchFamily="34" charset="-120"/>
               </a:rPr>
-              <a:t># PAPM calculators onboarded  ·  Run success rate</a:t>
+              <a:t>Connectivity approach validated  ·  Integration milestones met</a:t>
             </a:r>
             <a:endParaRPr lang="en-US" sz="850" dirty="0"/>
           </a:p>
@@ -5870,7 +5870,7 @@
                 <a:ea typeface="Calibri" pitchFamily="34" charset="-122"/>
                 <a:cs typeface="Calibri" pitchFamily="34" charset="-120"/>
               </a:rPr>
-              <a:t>Airflow upgrade discovery and analysis to define the target orchestration path.</a:t>
+              <a:t>Finalise the target modernisation architecture and complete discovery &amp; analysis for the Airflow 3.x upgrade.</a:t>
             </a:r>
             <a:endParaRPr lang="en-US" sz="1050" dirty="0"/>
           </a:p>
@@ -5952,7 +5952,7 @@
                 <a:ea typeface="Calibri" pitchFamily="34" charset="-122"/>
                 <a:cs typeface="Calibri" pitchFamily="34" charset="-120"/>
               </a:rPr>
-              <a:t>De-risked, decision-ready upgrade plan</a:t>
+              <a:t>Agreed target architecture</a:t>
             </a:r>
             <a:endParaRPr lang="en-US" sz="1000" dirty="0"/>
           </a:p>
@@ -5973,7 +5973,7 @@
                 <a:ea typeface="Calibri" pitchFamily="34" charset="-122"/>
                 <a:cs typeface="Calibri" pitchFamily="34" charset="-120"/>
               </a:rPr>
-              <a:t>Sustained security &amp; supportability</a:t>
+              <a:t>De-risked Airflow 3.x upgrade plan</a:t>
             </a:r>
             <a:endParaRPr lang="en-US" sz="1000" dirty="0"/>
           </a:p>
@@ -6026,7 +6026,7 @@
                 <a:ea typeface="Calibri" pitchFamily="34" charset="-122"/>
                 <a:cs typeface="Calibri" pitchFamily="34" charset="-120"/>
               </a:rPr>
-              <a:t>Discovery &amp; impact analysis complete  ·  Upgrade roadmap approved</a:t>
+              <a:t>Architecture signed off  ·  Airflow 3.x impact analysis complete</a:t>
             </a:r>
             <a:endParaRPr lang="en-US" sz="850" dirty="0"/>
           </a:p>
